--- a/dist/초1/수학/모양과비교/초1_수학_모양과비교_02_네모·세모·동그라미모양.pptx
+++ b/dist/초1/수학/모양과비교/초1_수학_모양과비교_02_네모·세모·동그라미모양.pptx
@@ -121,13 +121,13 @@
   <p:extLst>
     <p:ext uri="{521415D9-36F7-43E2-AB2F-B90AF26B5E84}">
       <p14:sectionLst xmlns:p14="http://schemas.microsoft.com/office/powerpoint/2010/main">
-        <p14:section name="도입" id="{1ba5c596-211c-1e13-956b-998b9bd3cc5b}">
+        <p14:section name="도입" id="{82a8bf48-0048-e312-6c44-25480914ce21}">
           <p14:sldIdLst>
             <p14:sldId id="256"/>
             <p14:sldId id="257"/>
           </p14:sldIdLst>
         </p14:section>
-        <p14:section name="개념" id="{bb713225-95ae-25eb-7dee-2a7962217c20}">
+        <p14:section name="개념" id="{e3686bec-8e23-16d6-7b2b-9c89f0f67a0a}">
           <p14:sldIdLst>
             <p14:sldId id="258"/>
             <p14:sldId id="259"/>
@@ -135,7 +135,7 @@
             <p14:sldId id="261"/>
           </p14:sldIdLst>
         </p14:section>
-        <p14:section name="연습" id="{7fa695c6-8f02-2e75-fca3-2b39170d46c7}">
+        <p14:section name="연습" id="{0a91aa6d-cc6b-4325-e721-a922e6269d5e}">
           <p14:sldIdLst>
             <p14:sldId id="262"/>
             <p14:sldId id="263"/>
@@ -143,19 +143,19 @@
             <p14:sldId id="265"/>
           </p14:sldIdLst>
         </p14:section>
-        <p14:section name="확인" id="{536b0719-481b-7a3e-9c2b-50d14a518379}">
+        <p14:section name="확인" id="{34151a8d-10a4-862d-8680-c14a2c58416d}">
           <p14:sldIdLst>
             <p14:sldId id="266"/>
             <p14:sldId id="267"/>
             <p14:sldId id="268"/>
           </p14:sldIdLst>
         </p14:section>
-        <p14:section name="정리" id="{2698bed9-e19e-8eb3-061c-b51d1cc534c0}">
+        <p14:section name="정리" id="{f848e441-0cb3-dbc5-ab2f-70c38d9994ef}">
           <p14:sldIdLst>
             <p14:sldId id="269"/>
           </p14:sldIdLst>
         </p14:section>
-        <p14:section name="보충" id="{fee2142c-a6e0-8483-ba9b-e5a114708284}">
+        <p14:section name="보충" id="{6a965a51-4373-c75e-e8e2-3f922eb20370}">
           <p14:sldIdLst>
             <p14:sldId id="270"/>
           </p14:sldIdLst>

--- a/dist/초1/수학/모양과비교/초1_수학_모양과비교_02_네모·세모·동그라미모양.pptx
+++ b/dist/초1/수학/모양과비교/초1_수학_모양과비교_02_네모·세모·동그라미모양.pptx
@@ -121,13 +121,13 @@
   <p:extLst>
     <p:ext uri="{521415D9-36F7-43E2-AB2F-B90AF26B5E84}">
       <p14:sectionLst xmlns:p14="http://schemas.microsoft.com/office/powerpoint/2010/main">
-        <p14:section name="도입" id="{82a8bf48-0048-e312-6c44-25480914ce21}">
+        <p14:section name="도입" id="{df86b4b7-9512-bb8b-4e9e-5e35167798f1}">
           <p14:sldIdLst>
             <p14:sldId id="256"/>
             <p14:sldId id="257"/>
           </p14:sldIdLst>
         </p14:section>
-        <p14:section name="개념" id="{e3686bec-8e23-16d6-7b2b-9c89f0f67a0a}">
+        <p14:section name="개념" id="{29a3a75b-a864-0aea-7f51-8fe839159340}">
           <p14:sldIdLst>
             <p14:sldId id="258"/>
             <p14:sldId id="259"/>
@@ -135,7 +135,7 @@
             <p14:sldId id="261"/>
           </p14:sldIdLst>
         </p14:section>
-        <p14:section name="연습" id="{0a91aa6d-cc6b-4325-e721-a922e6269d5e}">
+        <p14:section name="연습" id="{5950e62f-1a40-5647-8f8b-ac5f56718abb}">
           <p14:sldIdLst>
             <p14:sldId id="262"/>
             <p14:sldId id="263"/>
@@ -143,19 +143,19 @@
             <p14:sldId id="265"/>
           </p14:sldIdLst>
         </p14:section>
-        <p14:section name="확인" id="{34151a8d-10a4-862d-8680-c14a2c58416d}">
+        <p14:section name="확인" id="{1c9bcc0b-f99c-3195-f9e8-2a51222169cb}">
           <p14:sldIdLst>
             <p14:sldId id="266"/>
             <p14:sldId id="267"/>
             <p14:sldId id="268"/>
           </p14:sldIdLst>
         </p14:section>
-        <p14:section name="정리" id="{f848e441-0cb3-dbc5-ab2f-70c38d9994ef}">
+        <p14:section name="정리" id="{20105b61-40d6-98be-5a3d-b629699f6e98}">
           <p14:sldIdLst>
             <p14:sldId id="269"/>
           </p14:sldIdLst>
         </p14:section>
-        <p14:section name="보충" id="{6a965a51-4373-c75e-e8e2-3f922eb20370}">
+        <p14:section name="보충" id="{972cf7ef-ff5a-3b62-9ad9-b8475be08f62}">
           <p14:sldIdLst>
             <p14:sldId id="270"/>
           </p14:sldIdLst>
@@ -3044,7 +3044,7 @@
               <a:buNone/>
             </a:pPr>
             <a:r>
-              <a:rPr lang="ko-KR" altLang="en-US" sz="5000" b="1" dirty="0">
+              <a:rPr lang="ko-KR" altLang="en-US" sz="4800" b="1" dirty="0">
                 <a:solidFill>
                   <a:srgbClr val="FFFFFF"/>
                 </a:solidFill>
